--- a/ppt/IoT18-Micropython.pptx
+++ b/ppt/IoT18-Micropython.pptx
@@ -5,10 +5,10 @@
     <p:sldMasterId id="2147483653" r:id="rId1"/>
   </p:sldMasterIdLst>
   <p:notesMasterIdLst>
-    <p:notesMasterId r:id="rId18"/>
+    <p:notesMasterId r:id="rId19"/>
   </p:notesMasterIdLst>
   <p:handoutMasterIdLst>
-    <p:handoutMasterId r:id="rId19"/>
+    <p:handoutMasterId r:id="rId20"/>
   </p:handoutMasterIdLst>
   <p:sldIdLst>
     <p:sldId id="264" r:id="rId2"/>
@@ -18,15 +18,16 @@
     <p:sldId id="268" r:id="rId6"/>
     <p:sldId id="269" r:id="rId7"/>
     <p:sldId id="274" r:id="rId8"/>
-    <p:sldId id="273" r:id="rId9"/>
-    <p:sldId id="276" r:id="rId10"/>
-    <p:sldId id="275" r:id="rId11"/>
-    <p:sldId id="272" r:id="rId12"/>
-    <p:sldId id="270" r:id="rId13"/>
-    <p:sldId id="277" r:id="rId14"/>
-    <p:sldId id="278" r:id="rId15"/>
-    <p:sldId id="279" r:id="rId16"/>
-    <p:sldId id="280" r:id="rId17"/>
+    <p:sldId id="281" r:id="rId9"/>
+    <p:sldId id="273" r:id="rId10"/>
+    <p:sldId id="276" r:id="rId11"/>
+    <p:sldId id="275" r:id="rId12"/>
+    <p:sldId id="272" r:id="rId13"/>
+    <p:sldId id="270" r:id="rId14"/>
+    <p:sldId id="277" r:id="rId15"/>
+    <p:sldId id="278" r:id="rId16"/>
+    <p:sldId id="279" r:id="rId17"/>
+    <p:sldId id="280" r:id="rId18"/>
   </p:sldIdLst>
   <p:sldSz cx="9144000" cy="6858000" type="screen4x3"/>
   <p:notesSz cx="6648450" cy="9782175"/>
@@ -3765,6 +3766,170 @@
           <p:cNvPr id="2" name="Titre 1">
             <a:extLst>
               <a:ext uri="{FF2B5EF4-FFF2-40B4-BE49-F238E27FC236}">
+                <a16:creationId xmlns:a16="http://schemas.microsoft.com/office/drawing/2014/main" id="{D5DF0F8C-8302-F73F-971F-0CBE24EDBC89}"/>
+              </a:ext>
+            </a:extLst>
+          </p:cNvPr>
+          <p:cNvSpPr>
+            <a:spLocks noGrp="1"/>
+          </p:cNvSpPr>
+          <p:nvPr>
+            <p:ph type="title"/>
+          </p:nvPr>
+        </p:nvSpPr>
+        <p:spPr/>
+        <p:txBody>
+          <a:bodyPr/>
+          <a:lstStyle/>
+          <a:p>
+            <a:r>
+              <a:rPr lang="fr-FR" dirty="0"/>
+              <a:t>REPL</a:t>
+            </a:r>
+          </a:p>
+        </p:txBody>
+      </p:sp>
+      <p:sp>
+        <p:nvSpPr>
+          <p:cNvPr id="3" name="Espace réservé du contenu 2">
+            <a:extLst>
+              <a:ext uri="{FF2B5EF4-FFF2-40B4-BE49-F238E27FC236}">
+                <a16:creationId xmlns:a16="http://schemas.microsoft.com/office/drawing/2014/main" id="{3059DD2E-786F-905E-C265-D3DCD8F4182E}"/>
+              </a:ext>
+            </a:extLst>
+          </p:cNvPr>
+          <p:cNvSpPr>
+            <a:spLocks noGrp="1"/>
+          </p:cNvSpPr>
+          <p:nvPr>
+            <p:ph idx="1"/>
+          </p:nvPr>
+        </p:nvSpPr>
+        <p:spPr/>
+        <p:txBody>
+          <a:bodyPr/>
+          <a:lstStyle/>
+          <a:p>
+            <a:r>
+              <a:rPr lang="fr-FR" dirty="0"/>
+              <a:t>Read </a:t>
+            </a:r>
+            <a:r>
+              <a:rPr lang="fr-FR" dirty="0" err="1"/>
+              <a:t>Evaluate</a:t>
+            </a:r>
+            <a:r>
+              <a:rPr lang="fr-FR" dirty="0"/>
+              <a:t> </a:t>
+            </a:r>
+            <a:r>
+              <a:rPr lang="fr-FR" dirty="0" err="1"/>
+              <a:t>Print</a:t>
+            </a:r>
+            <a:r>
+              <a:rPr lang="fr-FR" dirty="0"/>
+              <a:t> Loop</a:t>
+            </a:r>
+          </a:p>
+          <a:p>
+            <a:pPr lvl="1"/>
+            <a:r>
+              <a:rPr lang="fr-FR" dirty="0"/>
+              <a:t>Il s'agit du prompt </a:t>
+            </a:r>
+            <a:r>
+              <a:rPr lang="fr-FR" dirty="0" err="1"/>
+              <a:t>Micropython</a:t>
+            </a:r>
+            <a:r>
+              <a:rPr lang="fr-FR" dirty="0"/>
+              <a:t> accessible via </a:t>
+            </a:r>
+            <a:r>
+              <a:rPr lang="fr-FR" dirty="0" err="1"/>
+              <a:t>Thonny</a:t>
+            </a:r>
+            <a:endParaRPr lang="fr-FR" dirty="0"/>
+          </a:p>
+          <a:p>
+            <a:pPr lvl="1"/>
+            <a:r>
+              <a:rPr lang="fr-FR" dirty="0"/>
+              <a:t>Par défaut sur UART0 (</a:t>
+            </a:r>
+            <a:r>
+              <a:rPr lang="fr-FR"/>
+              <a:t>USB)</a:t>
+            </a:r>
+            <a:endParaRPr lang="fr-FR" dirty="0"/>
+          </a:p>
+        </p:txBody>
+      </p:sp>
+      <p:pic>
+        <p:nvPicPr>
+          <p:cNvPr id="5" name="Image 4">
+            <a:extLst>
+              <a:ext uri="{FF2B5EF4-FFF2-40B4-BE49-F238E27FC236}">
+                <a16:creationId xmlns:a16="http://schemas.microsoft.com/office/drawing/2014/main" id="{002C1E65-D65A-D4E4-3D1C-CC041DA52AF6}"/>
+              </a:ext>
+            </a:extLst>
+          </p:cNvPr>
+          <p:cNvPicPr>
+            <a:picLocks noChangeAspect="1"/>
+          </p:cNvPicPr>
+          <p:nvPr/>
+        </p:nvPicPr>
+        <p:blipFill>
+          <a:blip r:embed="rId2"/>
+          <a:stretch>
+            <a:fillRect/>
+          </a:stretch>
+        </p:blipFill>
+        <p:spPr>
+          <a:xfrm>
+            <a:off x="2411760" y="3761277"/>
+            <a:ext cx="4505954" cy="1714739"/>
+          </a:xfrm>
+          <a:prstGeom prst="rect">
+            <a:avLst/>
+          </a:prstGeom>
+        </p:spPr>
+      </p:pic>
+    </p:spTree>
+    <p:extLst>
+      <p:ext uri="{BB962C8B-B14F-4D97-AF65-F5344CB8AC3E}">
+        <p14:creationId xmlns:p14="http://schemas.microsoft.com/office/powerpoint/2010/main" val="955643809"/>
+      </p:ext>
+    </p:extLst>
+  </p:cSld>
+  <p:clrMapOvr>
+    <a:masterClrMapping/>
+  </p:clrMapOvr>
+</p:sld>
+</file>
+
+<file path=ppt/slides/slide11.xml><?xml version="1.0" encoding="utf-8"?>
+<p:sld xmlns:a="http://schemas.openxmlformats.org/drawingml/2006/main" xmlns:r="http://schemas.openxmlformats.org/officeDocument/2006/relationships" xmlns:p="http://schemas.openxmlformats.org/presentationml/2006/main">
+  <p:cSld>
+    <p:spTree>
+      <p:nvGrpSpPr>
+        <p:cNvPr id="1" name=""/>
+        <p:cNvGrpSpPr/>
+        <p:nvPr/>
+      </p:nvGrpSpPr>
+      <p:grpSpPr>
+        <a:xfrm>
+          <a:off x="0" y="0"/>
+          <a:ext cx="0" cy="0"/>
+          <a:chOff x="0" y="0"/>
+          <a:chExt cx="0" cy="0"/>
+        </a:xfrm>
+      </p:grpSpPr>
+      <p:sp>
+        <p:nvSpPr>
+          <p:cNvPr id="2" name="Titre 1">
+            <a:extLst>
+              <a:ext uri="{FF2B5EF4-FFF2-40B4-BE49-F238E27FC236}">
                 <a16:creationId xmlns:a16="http://schemas.microsoft.com/office/drawing/2014/main" id="{EEAAC0A7-215E-B9A6-C2C9-B1B3F264D632}"/>
               </a:ext>
             </a:extLst>
@@ -3830,7 +3995,7 @@
 </p:sld>
 </file>
 
-<file path=ppt/slides/slide11.xml><?xml version="1.0" encoding="utf-8"?>
+<file path=ppt/slides/slide12.xml><?xml version="1.0" encoding="utf-8"?>
 <p:sld xmlns:a="http://schemas.openxmlformats.org/drawingml/2006/main" xmlns:r="http://schemas.openxmlformats.org/officeDocument/2006/relationships" xmlns:p="http://schemas.openxmlformats.org/presentationml/2006/main">
   <p:cSld>
     <p:spTree>
@@ -3928,7 +4093,7 @@
 </p:sld>
 </file>
 
-<file path=ppt/slides/slide12.xml><?xml version="1.0" encoding="utf-8"?>
+<file path=ppt/slides/slide13.xml><?xml version="1.0" encoding="utf-8"?>
 <p:sld xmlns:a="http://schemas.openxmlformats.org/drawingml/2006/main" xmlns:r="http://schemas.openxmlformats.org/officeDocument/2006/relationships" xmlns:p="http://schemas.openxmlformats.org/presentationml/2006/main">
   <p:cSld>
     <p:spTree>
@@ -4089,7 +4254,7 @@
 </p:sld>
 </file>
 
-<file path=ppt/slides/slide13.xml><?xml version="1.0" encoding="utf-8"?>
+<file path=ppt/slides/slide14.xml><?xml version="1.0" encoding="utf-8"?>
 <p:sld xmlns:a="http://schemas.openxmlformats.org/drawingml/2006/main" xmlns:r="http://schemas.openxmlformats.org/officeDocument/2006/relationships" xmlns:p="http://schemas.openxmlformats.org/presentationml/2006/main">
   <p:cSld>
     <p:spTree>
@@ -4374,7 +4539,7 @@
 </p:sld>
 </file>
 
-<file path=ppt/slides/slide14.xml><?xml version="1.0" encoding="utf-8"?>
+<file path=ppt/slides/slide15.xml><?xml version="1.0" encoding="utf-8"?>
 <p:sld xmlns:a="http://schemas.openxmlformats.org/drawingml/2006/main" xmlns:r="http://schemas.openxmlformats.org/officeDocument/2006/relationships" xmlns:p="http://schemas.openxmlformats.org/presentationml/2006/main">
   <p:cSld>
     <p:spTree>
@@ -4535,7 +4700,7 @@
 </p:sld>
 </file>
 
-<file path=ppt/slides/slide15.xml><?xml version="1.0" encoding="utf-8"?>
+<file path=ppt/slides/slide16.xml><?xml version="1.0" encoding="utf-8"?>
 <p:sld xmlns:a="http://schemas.openxmlformats.org/drawingml/2006/main" xmlns:r="http://schemas.openxmlformats.org/officeDocument/2006/relationships" xmlns:p="http://schemas.openxmlformats.org/presentationml/2006/main">
   <p:cSld>
     <p:spTree>
@@ -4699,7 +4864,7 @@
 </p:sld>
 </file>
 
-<file path=ppt/slides/slide16.xml><?xml version="1.0" encoding="utf-8"?>
+<file path=ppt/slides/slide17.xml><?xml version="1.0" encoding="utf-8"?>
 <p:sld xmlns:a="http://schemas.openxmlformats.org/drawingml/2006/main" xmlns:r="http://schemas.openxmlformats.org/officeDocument/2006/relationships" xmlns:p="http://schemas.openxmlformats.org/presentationml/2006/main">
   <p:cSld>
     <p:spTree>
@@ -5694,6 +5859,146 @@
 </file>
 
 <file path=ppt/slides/slide8.xml><?xml version="1.0" encoding="utf-8"?>
+<p:sld xmlns:a="http://schemas.openxmlformats.org/drawingml/2006/main" xmlns:r="http://schemas.openxmlformats.org/officeDocument/2006/relationships" xmlns:p="http://schemas.openxmlformats.org/presentationml/2006/main">
+  <p:cSld>
+    <p:spTree>
+      <p:nvGrpSpPr>
+        <p:cNvPr id="1" name=""/>
+        <p:cNvGrpSpPr/>
+        <p:nvPr/>
+      </p:nvGrpSpPr>
+      <p:grpSpPr>
+        <a:xfrm>
+          <a:off x="0" y="0"/>
+          <a:ext cx="0" cy="0"/>
+          <a:chOff x="0" y="0"/>
+          <a:chExt cx="0" cy="0"/>
+        </a:xfrm>
+      </p:grpSpPr>
+      <p:sp>
+        <p:nvSpPr>
+          <p:cNvPr id="2" name="Titre 1">
+            <a:extLst>
+              <a:ext uri="{FF2B5EF4-FFF2-40B4-BE49-F238E27FC236}">
+                <a16:creationId xmlns:a16="http://schemas.microsoft.com/office/drawing/2014/main" id="{8AE0A19A-5B31-30D9-E473-EF9671134FAC}"/>
+              </a:ext>
+            </a:extLst>
+          </p:cNvPr>
+          <p:cNvSpPr>
+            <a:spLocks noGrp="1"/>
+          </p:cNvSpPr>
+          <p:nvPr>
+            <p:ph type="title"/>
+          </p:nvPr>
+        </p:nvSpPr>
+        <p:spPr/>
+        <p:txBody>
+          <a:bodyPr/>
+          <a:lstStyle/>
+          <a:p>
+            <a:r>
+              <a:rPr lang="fr-FR" dirty="0"/>
+              <a:t>Installation détaillée</a:t>
+            </a:r>
+          </a:p>
+        </p:txBody>
+      </p:sp>
+      <p:sp>
+        <p:nvSpPr>
+          <p:cNvPr id="3" name="Espace réservé du contenu 2">
+            <a:extLst>
+              <a:ext uri="{FF2B5EF4-FFF2-40B4-BE49-F238E27FC236}">
+                <a16:creationId xmlns:a16="http://schemas.microsoft.com/office/drawing/2014/main" id="{47BF268A-0A39-1F36-0D54-46F2235D5AF2}"/>
+              </a:ext>
+            </a:extLst>
+          </p:cNvPr>
+          <p:cNvSpPr>
+            <a:spLocks noGrp="1"/>
+          </p:cNvSpPr>
+          <p:nvPr>
+            <p:ph idx="1"/>
+          </p:nvPr>
+        </p:nvSpPr>
+        <p:spPr>
+          <a:xfrm>
+            <a:off x="179513" y="1412776"/>
+            <a:ext cx="3282534" cy="5040560"/>
+          </a:xfrm>
+        </p:spPr>
+        <p:txBody>
+          <a:bodyPr/>
+          <a:lstStyle/>
+          <a:p>
+            <a:r>
+              <a:rPr lang="fr-FR" sz="2400" dirty="0"/>
+              <a:t>Cliquer sur Install or Update </a:t>
+            </a:r>
+            <a:r>
+              <a:rPr lang="fr-FR" sz="2400" dirty="0" err="1"/>
+              <a:t>MicroPython</a:t>
+            </a:r>
+            <a:r>
+              <a:rPr lang="fr-FR" sz="2400" dirty="0"/>
+              <a:t> (</a:t>
+            </a:r>
+            <a:r>
+              <a:rPr lang="fr-FR" sz="2400" dirty="0" err="1"/>
+              <a:t>esptool</a:t>
+            </a:r>
+            <a:r>
+              <a:rPr lang="fr-FR" sz="2400" dirty="0"/>
+              <a:t>)</a:t>
+            </a:r>
+          </a:p>
+          <a:p>
+            <a:endParaRPr lang="fr-FR" dirty="0"/>
+          </a:p>
+        </p:txBody>
+      </p:sp>
+      <p:pic>
+        <p:nvPicPr>
+          <p:cNvPr id="5" name="Image 4">
+            <a:extLst>
+              <a:ext uri="{FF2B5EF4-FFF2-40B4-BE49-F238E27FC236}">
+                <a16:creationId xmlns:a16="http://schemas.microsoft.com/office/drawing/2014/main" id="{5D01C972-926F-CBB3-535B-57093F309C07}"/>
+              </a:ext>
+            </a:extLst>
+          </p:cNvPr>
+          <p:cNvPicPr>
+            <a:picLocks noChangeAspect="1"/>
+          </p:cNvPicPr>
+          <p:nvPr/>
+        </p:nvPicPr>
+        <p:blipFill>
+          <a:blip r:embed="rId2"/>
+          <a:stretch>
+            <a:fillRect/>
+          </a:stretch>
+        </p:blipFill>
+        <p:spPr>
+          <a:xfrm>
+            <a:off x="3462046" y="1412776"/>
+            <a:ext cx="5681954" cy="5432015"/>
+          </a:xfrm>
+          <a:prstGeom prst="rect">
+            <a:avLst/>
+          </a:prstGeom>
+        </p:spPr>
+      </p:pic>
+    </p:spTree>
+    <p:extLst>
+      <p:ext uri="{BB962C8B-B14F-4D97-AF65-F5344CB8AC3E}">
+        <p14:creationId xmlns:p14="http://schemas.microsoft.com/office/powerpoint/2010/main" val="2884418889"/>
+      </p:ext>
+    </p:extLst>
+  </p:cSld>
+  <p:clrMapOvr>
+    <a:masterClrMapping/>
+  </p:clrMapOvr>
+</p:sld>
+</file>
+
+<file path=ppt/slides/slide9.xml><?xml version="1.0" encoding="utf-8"?>
 <p:sld xmlns:a="http://schemas.openxmlformats.org/drawingml/2006/main" xmlns:r="http://schemas.openxmlformats.org/officeDocument/2006/relationships" xmlns:p="http://schemas.openxmlformats.org/presentationml/2006/main">
   <p:cSld>
     <p:spTree>
@@ -5978,170 +6283,6 @@
     <p:extLst>
       <p:ext uri="{BB962C8B-B14F-4D97-AF65-F5344CB8AC3E}">
         <p14:creationId xmlns:p14="http://schemas.microsoft.com/office/powerpoint/2010/main" val="635098434"/>
-      </p:ext>
-    </p:extLst>
-  </p:cSld>
-  <p:clrMapOvr>
-    <a:masterClrMapping/>
-  </p:clrMapOvr>
-</p:sld>
-</file>
-
-<file path=ppt/slides/slide9.xml><?xml version="1.0" encoding="utf-8"?>
-<p:sld xmlns:a="http://schemas.openxmlformats.org/drawingml/2006/main" xmlns:r="http://schemas.openxmlformats.org/officeDocument/2006/relationships" xmlns:p="http://schemas.openxmlformats.org/presentationml/2006/main">
-  <p:cSld>
-    <p:spTree>
-      <p:nvGrpSpPr>
-        <p:cNvPr id="1" name=""/>
-        <p:cNvGrpSpPr/>
-        <p:nvPr/>
-      </p:nvGrpSpPr>
-      <p:grpSpPr>
-        <a:xfrm>
-          <a:off x="0" y="0"/>
-          <a:ext cx="0" cy="0"/>
-          <a:chOff x="0" y="0"/>
-          <a:chExt cx="0" cy="0"/>
-        </a:xfrm>
-      </p:grpSpPr>
-      <p:sp>
-        <p:nvSpPr>
-          <p:cNvPr id="2" name="Titre 1">
-            <a:extLst>
-              <a:ext uri="{FF2B5EF4-FFF2-40B4-BE49-F238E27FC236}">
-                <a16:creationId xmlns:a16="http://schemas.microsoft.com/office/drawing/2014/main" id="{D5DF0F8C-8302-F73F-971F-0CBE24EDBC89}"/>
-              </a:ext>
-            </a:extLst>
-          </p:cNvPr>
-          <p:cNvSpPr>
-            <a:spLocks noGrp="1"/>
-          </p:cNvSpPr>
-          <p:nvPr>
-            <p:ph type="title"/>
-          </p:nvPr>
-        </p:nvSpPr>
-        <p:spPr/>
-        <p:txBody>
-          <a:bodyPr/>
-          <a:lstStyle/>
-          <a:p>
-            <a:r>
-              <a:rPr lang="fr-FR" dirty="0"/>
-              <a:t>REPL</a:t>
-            </a:r>
-          </a:p>
-        </p:txBody>
-      </p:sp>
-      <p:sp>
-        <p:nvSpPr>
-          <p:cNvPr id="3" name="Espace réservé du contenu 2">
-            <a:extLst>
-              <a:ext uri="{FF2B5EF4-FFF2-40B4-BE49-F238E27FC236}">
-                <a16:creationId xmlns:a16="http://schemas.microsoft.com/office/drawing/2014/main" id="{3059DD2E-786F-905E-C265-D3DCD8F4182E}"/>
-              </a:ext>
-            </a:extLst>
-          </p:cNvPr>
-          <p:cNvSpPr>
-            <a:spLocks noGrp="1"/>
-          </p:cNvSpPr>
-          <p:nvPr>
-            <p:ph idx="1"/>
-          </p:nvPr>
-        </p:nvSpPr>
-        <p:spPr/>
-        <p:txBody>
-          <a:bodyPr/>
-          <a:lstStyle/>
-          <a:p>
-            <a:r>
-              <a:rPr lang="fr-FR" dirty="0"/>
-              <a:t>Read </a:t>
-            </a:r>
-            <a:r>
-              <a:rPr lang="fr-FR" dirty="0" err="1"/>
-              <a:t>Evaluate</a:t>
-            </a:r>
-            <a:r>
-              <a:rPr lang="fr-FR" dirty="0"/>
-              <a:t> </a:t>
-            </a:r>
-            <a:r>
-              <a:rPr lang="fr-FR" dirty="0" err="1"/>
-              <a:t>Print</a:t>
-            </a:r>
-            <a:r>
-              <a:rPr lang="fr-FR" dirty="0"/>
-              <a:t> Loop</a:t>
-            </a:r>
-          </a:p>
-          <a:p>
-            <a:pPr lvl="1"/>
-            <a:r>
-              <a:rPr lang="fr-FR" dirty="0"/>
-              <a:t>Il s'agit du prompt </a:t>
-            </a:r>
-            <a:r>
-              <a:rPr lang="fr-FR" dirty="0" err="1"/>
-              <a:t>Micropython</a:t>
-            </a:r>
-            <a:r>
-              <a:rPr lang="fr-FR" dirty="0"/>
-              <a:t> accessible via </a:t>
-            </a:r>
-            <a:r>
-              <a:rPr lang="fr-FR" dirty="0" err="1"/>
-              <a:t>Thonny</a:t>
-            </a:r>
-            <a:endParaRPr lang="fr-FR" dirty="0"/>
-          </a:p>
-          <a:p>
-            <a:pPr lvl="1"/>
-            <a:r>
-              <a:rPr lang="fr-FR" dirty="0"/>
-              <a:t>Par défaut sur UART0 (</a:t>
-            </a:r>
-            <a:r>
-              <a:rPr lang="fr-FR"/>
-              <a:t>USB)</a:t>
-            </a:r>
-            <a:endParaRPr lang="fr-FR" dirty="0"/>
-          </a:p>
-        </p:txBody>
-      </p:sp>
-      <p:pic>
-        <p:nvPicPr>
-          <p:cNvPr id="5" name="Image 4">
-            <a:extLst>
-              <a:ext uri="{FF2B5EF4-FFF2-40B4-BE49-F238E27FC236}">
-                <a16:creationId xmlns:a16="http://schemas.microsoft.com/office/drawing/2014/main" id="{002C1E65-D65A-D4E4-3D1C-CC041DA52AF6}"/>
-              </a:ext>
-            </a:extLst>
-          </p:cNvPr>
-          <p:cNvPicPr>
-            <a:picLocks noChangeAspect="1"/>
-          </p:cNvPicPr>
-          <p:nvPr/>
-        </p:nvPicPr>
-        <p:blipFill>
-          <a:blip r:embed="rId2"/>
-          <a:stretch>
-            <a:fillRect/>
-          </a:stretch>
-        </p:blipFill>
-        <p:spPr>
-          <a:xfrm>
-            <a:off x="2411760" y="3761277"/>
-            <a:ext cx="4505954" cy="1714739"/>
-          </a:xfrm>
-          <a:prstGeom prst="rect">
-            <a:avLst/>
-          </a:prstGeom>
-        </p:spPr>
-      </p:pic>
-    </p:spTree>
-    <p:extLst>
-      <p:ext uri="{BB962C8B-B14F-4D97-AF65-F5344CB8AC3E}">
-        <p14:creationId xmlns:p14="http://schemas.microsoft.com/office/powerpoint/2010/main" val="955643809"/>
       </p:ext>
     </p:extLst>
   </p:cSld>
